--- a/examples/ppt/pictures/pictures-basic.pptx
+++ b/examples/ppt/pictures/pictures-basic.pptx
@@ -5,11 +5,11 @@
     <p:sldMasterId xmlns:r="http://schemas.openxmlformats.org/officeDocument/2006/relationships" id="2147483648" r:id="rId1"/>
   </p:sldMasterIdLst>
   <p:sldIdLst>
-    <p:sldId id="256" r:id="Red16db99dd714ee3"/>
-    <p:sldId id="257" r:id="R5e385fcf774f4f18"/>
-    <p:sldId id="258" r:id="R1c59c99c730c46b8"/>
-    <p:sldId id="259" r:id="Rcb53246a0a5c496c"/>
-    <p:sldId id="260" r:id="Rf3d87a5d776f4178"/>
+    <p:sldId id="256" r:id="Rf2a516c2b5e74885"/>
+    <p:sldId id="257" r:id="Rae189bf2f2db4fa9"/>
+    <p:sldId id="258" r:id="Rb47bf3a8ead84d22"/>
+    <p:sldId id="259" r:id="Ra1cef5e438fd4889"/>
+    <p:sldId id="260" r:id="R22d88140193241df"/>
   </p:sldIdLst>
   <p:sldSz cx="12192000" cy="6858000"/>
   <p:notesSz cx="6858000" cy="9144000"/>
@@ -284,7 +284,7 @@
 </file>
 
 <file path=ppt/slideMasters/slideMaster1.xml><?xml version="1.0" encoding="utf-8"?>
-<p:sldMaster xmlns:p="http://schemas.openxmlformats.org/presentationml/2006/main">
+<p:sldMaster xmlns:r="http://schemas.openxmlformats.org/officeDocument/2006/relationships" xmlns:p="http://schemas.openxmlformats.org/presentationml/2006/main">
   <p:cSld>
     <p:spTree>
       <p:nvGrpSpPr>
@@ -351,7 +351,7 @@
           <p:nvPr/>
         </p:nvPicPr>
         <p:blipFill>
-          <a:blip xmlns:r="http://schemas.openxmlformats.org/officeDocument/2006/relationships" xmlns:a="http://schemas.openxmlformats.org/drawingml/2006/main" r:embed="R37b9258640074a38"/>
+          <a:blip xmlns:r="http://schemas.openxmlformats.org/officeDocument/2006/relationships" xmlns:a="http://schemas.openxmlformats.org/drawingml/2006/main" r:embed="Rcf09202f3f674760"/>
           <a:stretch xmlns:a="http://schemas.openxmlformats.org/drawingml/2006/main">
             <a:fillRect/>
           </a:stretch>
@@ -401,7 +401,7 @@
           <p:nvPr/>
         </p:nvPicPr>
         <p:blipFill>
-          <a:blip xmlns:r="http://schemas.openxmlformats.org/officeDocument/2006/relationships" xmlns:a="http://schemas.openxmlformats.org/drawingml/2006/main" r:embed="Rd2ef798d189540d5"/>
+          <a:blip xmlns:r="http://schemas.openxmlformats.org/officeDocument/2006/relationships" xmlns:a="http://schemas.openxmlformats.org/drawingml/2006/main" r:embed="Rbc4289df07444dbd"/>
           <a:stretch xmlns:a="http://schemas.openxmlformats.org/drawingml/2006/main">
             <a:fillRect/>
           </a:stretch>
@@ -451,7 +451,7 @@
           <p:nvPr/>
         </p:nvPicPr>
         <p:blipFill>
-          <a:blip xmlns:r="http://schemas.openxmlformats.org/officeDocument/2006/relationships" xmlns:a="http://schemas.openxmlformats.org/drawingml/2006/main" r:embed="R5ab13fa2e97a4b95" cstate="print"/>
+          <a:blip xmlns:r="http://schemas.openxmlformats.org/officeDocument/2006/relationships" xmlns:a="http://schemas.openxmlformats.org/drawingml/2006/main" r:embed="Re7ab856f84ef4e8f" cstate="print"/>
           <a:stretch xmlns:a="http://schemas.openxmlformats.org/drawingml/2006/main">
             <a:fillRect/>
           </a:stretch>
@@ -542,7 +542,7 @@
           <p:nvPr/>
         </p:nvPicPr>
         <p:blipFill>
-          <a:blip xmlns:r="http://schemas.openxmlformats.org/officeDocument/2006/relationships" xmlns:a="http://schemas.openxmlformats.org/drawingml/2006/main" r:embed="Rf189b9a87eff48d0"/>
+          <a:blip xmlns:r="http://schemas.openxmlformats.org/officeDocument/2006/relationships" xmlns:a="http://schemas.openxmlformats.org/drawingml/2006/main" r:embed="R5d2fac282d8d4009"/>
           <a:stretch xmlns:a="http://schemas.openxmlformats.org/drawingml/2006/main">
             <a:fillRect/>
           </a:stretch>
@@ -592,7 +592,7 @@
           <p:nvPr/>
         </p:nvPicPr>
         <p:blipFill>
-          <a:blip xmlns:r="http://schemas.openxmlformats.org/officeDocument/2006/relationships" xmlns:a="http://schemas.openxmlformats.org/drawingml/2006/main" r:embed="Rdf1f50511d5a4cd8"/>
+          <a:blip xmlns:r="http://schemas.openxmlformats.org/officeDocument/2006/relationships" xmlns:a="http://schemas.openxmlformats.org/drawingml/2006/main" r:embed="R2236574006094845"/>
           <a:srcRect xmlns:a="http://schemas.openxmlformats.org/drawingml/2006/main" l="20000" t="20000" r="20000" b="20000"/>
           <a:stretch xmlns:a="http://schemas.openxmlformats.org/drawingml/2006/main">
             <a:fillRect/>
@@ -643,7 +643,7 @@
           <p:nvPr/>
         </p:nvPicPr>
         <p:blipFill>
-          <a:blip xmlns:r="http://schemas.openxmlformats.org/officeDocument/2006/relationships" xmlns:a="http://schemas.openxmlformats.org/drawingml/2006/main" r:embed="Ref52cffddf65483b"/>
+          <a:blip xmlns:r="http://schemas.openxmlformats.org/officeDocument/2006/relationships" xmlns:a="http://schemas.openxmlformats.org/drawingml/2006/main" r:embed="R32cbd9a51030413d"/>
           <a:srcRect xmlns:a="http://schemas.openxmlformats.org/drawingml/2006/main" l="30000" t="10000" r="30000" b="10000"/>
           <a:stretch xmlns:a="http://schemas.openxmlformats.org/drawingml/2006/main">
             <a:fillRect/>
@@ -694,7 +694,7 @@
           <p:nvPr/>
         </p:nvPicPr>
         <p:blipFill>
-          <a:blip xmlns:r="http://schemas.openxmlformats.org/officeDocument/2006/relationships" xmlns:a="http://schemas.openxmlformats.org/drawingml/2006/main" r:embed="R9bfda40776114cbf"/>
+          <a:blip xmlns:r="http://schemas.openxmlformats.org/officeDocument/2006/relationships" xmlns:a="http://schemas.openxmlformats.org/drawingml/2006/main" r:embed="R2c803639fd8f4976"/>
           <a:srcRect xmlns:a="http://schemas.openxmlformats.org/drawingml/2006/main" l="25000" t="25000"/>
           <a:stretch xmlns:a="http://schemas.openxmlformats.org/drawingml/2006/main">
             <a:fillRect/>
@@ -745,7 +745,7 @@
           <p:nvPr/>
         </p:nvPicPr>
         <p:blipFill>
-          <a:blip xmlns:r="http://schemas.openxmlformats.org/officeDocument/2006/relationships" xmlns:a="http://schemas.openxmlformats.org/drawingml/2006/main" r:embed="R05f483b0ca114373"/>
+          <a:blip xmlns:r="http://schemas.openxmlformats.org/officeDocument/2006/relationships" xmlns:a="http://schemas.openxmlformats.org/drawingml/2006/main" r:embed="Rd526bd159bad4b1a"/>
           <a:srcRect xmlns:a="http://schemas.openxmlformats.org/drawingml/2006/main" l="5000" t="10000" r="40000" b="20000"/>
           <a:stretch xmlns:a="http://schemas.openxmlformats.org/drawingml/2006/main">
             <a:fillRect/>
@@ -837,7 +837,7 @@
           <p:nvPr/>
         </p:nvPicPr>
         <p:blipFill>
-          <a:blip xmlns:r="http://schemas.openxmlformats.org/officeDocument/2006/relationships" xmlns:a="http://schemas.openxmlformats.org/drawingml/2006/main" r:embed="R01e9421dd60946cd"/>
+          <a:blip xmlns:r="http://schemas.openxmlformats.org/officeDocument/2006/relationships" xmlns:a="http://schemas.openxmlformats.org/drawingml/2006/main" r:embed="Rd95cf3af7c114026"/>
           <a:stretch xmlns:a="http://schemas.openxmlformats.org/drawingml/2006/main">
             <a:fillRect/>
           </a:stretch>
@@ -887,7 +887,7 @@
           <p:nvPr/>
         </p:nvPicPr>
         <p:blipFill>
-          <a:blip xmlns:r="http://schemas.openxmlformats.org/officeDocument/2006/relationships" xmlns:a="http://schemas.openxmlformats.org/drawingml/2006/main" r:embed="R183fcebd88a74873"/>
+          <a:blip xmlns:r="http://schemas.openxmlformats.org/officeDocument/2006/relationships" xmlns:a="http://schemas.openxmlformats.org/drawingml/2006/main" r:embed="R4dd26440962b401b"/>
           <a:stretch xmlns:a="http://schemas.openxmlformats.org/drawingml/2006/main">
             <a:fillRect/>
           </a:stretch>
@@ -937,7 +937,7 @@
           <p:nvPr/>
         </p:nvPicPr>
         <p:blipFill>
-          <a:blip xmlns:r="http://schemas.openxmlformats.org/officeDocument/2006/relationships" xmlns:a="http://schemas.openxmlformats.org/drawingml/2006/main" r:embed="R58101af510754738"/>
+          <a:blip xmlns:r="http://schemas.openxmlformats.org/officeDocument/2006/relationships" xmlns:a="http://schemas.openxmlformats.org/drawingml/2006/main" r:embed="Ra5b417d0d96e469f"/>
           <a:stretch xmlns:a="http://schemas.openxmlformats.org/drawingml/2006/main">
             <a:fillRect/>
           </a:stretch>
@@ -987,7 +987,7 @@
           <p:nvPr/>
         </p:nvPicPr>
         <p:blipFill>
-          <a:blip xmlns:r="http://schemas.openxmlformats.org/officeDocument/2006/relationships" xmlns:a="http://schemas.openxmlformats.org/drawingml/2006/main" r:embed="R610873d96f9842bb"/>
+          <a:blip xmlns:r="http://schemas.openxmlformats.org/officeDocument/2006/relationships" xmlns:a="http://schemas.openxmlformats.org/drawingml/2006/main" r:embed="R40c37cc11b284e53"/>
           <a:stretch xmlns:a="http://schemas.openxmlformats.org/drawingml/2006/main">
             <a:fillRect/>
           </a:stretch>
@@ -1037,7 +1037,7 @@
           <p:nvPr/>
         </p:nvPicPr>
         <p:blipFill>
-          <a:blip xmlns:r="http://schemas.openxmlformats.org/officeDocument/2006/relationships" xmlns:a="http://schemas.openxmlformats.org/drawingml/2006/main" r:embed="R9229685053b44d26"/>
+          <a:blip xmlns:r="http://schemas.openxmlformats.org/officeDocument/2006/relationships" xmlns:a="http://schemas.openxmlformats.org/drawingml/2006/main" r:embed="R50637db145bc4af7"/>
           <a:stretch xmlns:a="http://schemas.openxmlformats.org/drawingml/2006/main">
             <a:fillRect/>
           </a:stretch>
@@ -1087,7 +1087,7 @@
           <p:nvPr/>
         </p:nvPicPr>
         <p:blipFill>
-          <a:blip xmlns:r="http://schemas.openxmlformats.org/officeDocument/2006/relationships" xmlns:a="http://schemas.openxmlformats.org/drawingml/2006/main" r:embed="Rb340eaaf410c4405"/>
+          <a:blip xmlns:r="http://schemas.openxmlformats.org/officeDocument/2006/relationships" xmlns:a="http://schemas.openxmlformats.org/drawingml/2006/main" r:embed="R12aba0b224464e06"/>
           <a:stretch xmlns:a="http://schemas.openxmlformats.org/drawingml/2006/main">
             <a:fillRect/>
           </a:stretch>
@@ -1172,7 +1172,7 @@
       <p:pic>
         <p:nvPicPr>
           <p:cNvPr id="100032" name="Picture 1">
-            <a:hlinkClick xmlns:r="http://schemas.openxmlformats.org/officeDocument/2006/relationships" xmlns:a="http://schemas.openxmlformats.org/drawingml/2006/main" r:id="Rc18b1a62bf1a49d9" tooltip="Open example.com"/>
+            <a:hlinkClick xmlns:r="http://schemas.openxmlformats.org/officeDocument/2006/relationships" xmlns:a="http://schemas.openxmlformats.org/drawingml/2006/main" r:id="Rb80bd8b348e540a6" tooltip="Open example.com"/>
           </p:cNvPr>
           <p:cNvPicPr>
             <a:picLocks xmlns:a="http://schemas.openxmlformats.org/drawingml/2006/main" noChangeAspect="1"/>
@@ -1180,7 +1180,7 @@
           <p:nvPr/>
         </p:nvPicPr>
         <p:blipFill>
-          <a:blip xmlns:r="http://schemas.openxmlformats.org/officeDocument/2006/relationships" xmlns:a="http://schemas.openxmlformats.org/drawingml/2006/main" r:embed="Rae0a5663796e4c15"/>
+          <a:blip xmlns:r="http://schemas.openxmlformats.org/officeDocument/2006/relationships" xmlns:a="http://schemas.openxmlformats.org/drawingml/2006/main" r:embed="R7e599e8614304b92"/>
           <a:stretch xmlns:a="http://schemas.openxmlformats.org/drawingml/2006/main">
             <a:fillRect/>
           </a:stretch>
@@ -1224,7 +1224,7 @@
       <p:pic>
         <p:nvPicPr>
           <p:cNvPr id="100034" name="Picture 2">
-            <a:hlinkClick xmlns:r="http://schemas.openxmlformats.org/officeDocument/2006/relationships" xmlns:a="http://schemas.openxmlformats.org/drawingml/2006/main" r:id="R86df93221ee84280" action="ppaction://hlinksldjump" tooltip="Back to slide 1"/>
+            <a:hlinkClick xmlns:r="http://schemas.openxmlformats.org/officeDocument/2006/relationships" xmlns:a="http://schemas.openxmlformats.org/drawingml/2006/main" r:id="R1ffa30da263b44e6" action="ppaction://hlinksldjump" tooltip="Back to slide 1"/>
           </p:cNvPr>
           <p:cNvPicPr>
             <a:picLocks xmlns:a="http://schemas.openxmlformats.org/drawingml/2006/main" noChangeAspect="1"/>
@@ -1232,7 +1232,7 @@
           <p:nvPr/>
         </p:nvPicPr>
         <p:blipFill>
-          <a:blip xmlns:r="http://schemas.openxmlformats.org/officeDocument/2006/relationships" xmlns:a="http://schemas.openxmlformats.org/drawingml/2006/main" r:embed="Rf50b00c1cf6a417c"/>
+          <a:blip xmlns:r="http://schemas.openxmlformats.org/officeDocument/2006/relationships" xmlns:a="http://schemas.openxmlformats.org/drawingml/2006/main" r:embed="R5f31620322124a83"/>
           <a:stretch xmlns:a="http://schemas.openxmlformats.org/drawingml/2006/main">
             <a:fillRect/>
           </a:stretch>
@@ -1284,7 +1284,7 @@
           <p:nvPr/>
         </p:nvPicPr>
         <p:blipFill>
-          <a:blip xmlns:r="http://schemas.openxmlformats.org/officeDocument/2006/relationships" xmlns:a="http://schemas.openxmlformats.org/drawingml/2006/main" r:embed="R784797d5d6814bbe"/>
+          <a:blip xmlns:r="http://schemas.openxmlformats.org/officeDocument/2006/relationships" xmlns:a="http://schemas.openxmlformats.org/drawingml/2006/main" r:embed="Ra463ddae7187459a"/>
           <a:stretch xmlns:a="http://schemas.openxmlformats.org/drawingml/2006/main">
             <a:fillRect/>
           </a:stretch>
@@ -1375,7 +1375,7 @@
           <p:nvPr/>
         </p:nvPicPr>
         <p:blipFill>
-          <a:blip xmlns:r="http://schemas.openxmlformats.org/officeDocument/2006/relationships" xmlns:a="http://schemas.openxmlformats.org/drawingml/2006/main" r:embed="R01c2d40a77de494d"/>
+          <a:blip xmlns:r="http://schemas.openxmlformats.org/officeDocument/2006/relationships" xmlns:a="http://schemas.openxmlformats.org/drawingml/2006/main" r:embed="R063c964f5cfc49ef"/>
           <a:stretch xmlns:a="http://schemas.openxmlformats.org/drawingml/2006/main">
             <a:fillRect/>
           </a:stretch>
@@ -1425,7 +1425,7 @@
           <p:nvPr/>
         </p:nvPicPr>
         <p:blipFill>
-          <a:blip xmlns:r="http://schemas.openxmlformats.org/officeDocument/2006/relationships" xmlns:a="http://schemas.openxmlformats.org/drawingml/2006/main" r:embed="Rd51d33dfed944361">
+          <a:blip xmlns:r="http://schemas.openxmlformats.org/officeDocument/2006/relationships" xmlns:a="http://schemas.openxmlformats.org/drawingml/2006/main" r:embed="Rec2258f1ba254d82">
             <a:lum bright="40000"/>
           </a:blip>
           <a:stretch xmlns:a="http://schemas.openxmlformats.org/drawingml/2006/main">
@@ -1477,7 +1477,7 @@
           <p:nvPr/>
         </p:nvPicPr>
         <p:blipFill>
-          <a:blip xmlns:r="http://schemas.openxmlformats.org/officeDocument/2006/relationships" xmlns:a="http://schemas.openxmlformats.org/drawingml/2006/main" r:embed="Rd6d5d6511d6a4d05">
+          <a:blip xmlns:r="http://schemas.openxmlformats.org/officeDocument/2006/relationships" xmlns:a="http://schemas.openxmlformats.org/drawingml/2006/main" r:embed="Rdccab7e73e49430a">
             <a:lum contrast="-30000"/>
           </a:blip>
           <a:stretch xmlns:a="http://schemas.openxmlformats.org/drawingml/2006/main">
@@ -1529,7 +1529,7 @@
           <p:nvPr/>
         </p:nvPicPr>
         <p:blipFill>
-          <a:blip xmlns:r="http://schemas.openxmlformats.org/officeDocument/2006/relationships" xmlns:a="http://schemas.openxmlformats.org/drawingml/2006/main" r:embed="Rd7d72a476f9a4323">
+          <a:blip xmlns:r="http://schemas.openxmlformats.org/officeDocument/2006/relationships" xmlns:a="http://schemas.openxmlformats.org/drawingml/2006/main" r:embed="Rc351d73a630d4c15">
             <a:lum bright="-20000" contrast="40000"/>
           </a:blip>
           <a:stretch xmlns:a="http://schemas.openxmlformats.org/drawingml/2006/main">
@@ -1581,7 +1581,7 @@
           <p:nvPr/>
         </p:nvPicPr>
         <p:blipFill>
-          <a:blip xmlns:r="http://schemas.openxmlformats.org/officeDocument/2006/relationships" xmlns:a="http://schemas.openxmlformats.org/drawingml/2006/main" r:embed="Rd5035db721214237"/>
+          <a:blip xmlns:r="http://schemas.openxmlformats.org/officeDocument/2006/relationships" xmlns:a="http://schemas.openxmlformats.org/drawingml/2006/main" r:embed="R3ad5d60007034493"/>
           <a:stretch xmlns:a="http://schemas.openxmlformats.org/drawingml/2006/main">
             <a:fillRect/>
           </a:stretch>
@@ -1638,7 +1638,7 @@
           <p:nvPr/>
         </p:nvPicPr>
         <p:blipFill>
-          <a:blip xmlns:r="http://schemas.openxmlformats.org/officeDocument/2006/relationships" xmlns:a="http://schemas.openxmlformats.org/drawingml/2006/main" r:embed="R14be3aa4bc534a6b"/>
+          <a:blip xmlns:r="http://schemas.openxmlformats.org/officeDocument/2006/relationships" xmlns:a="http://schemas.openxmlformats.org/drawingml/2006/main" r:embed="Rdeec992112374045"/>
           <a:stretch xmlns:a="http://schemas.openxmlformats.org/drawingml/2006/main">
             <a:fillRect/>
           </a:stretch>
@@ -1695,7 +1695,7 @@
           <p:nvPr/>
         </p:nvPicPr>
         <p:blipFill>
-          <a:blip xmlns:r="http://schemas.openxmlformats.org/officeDocument/2006/relationships" xmlns:a="http://schemas.openxmlformats.org/drawingml/2006/main" r:embed="R06d29cc1549f44ac"/>
+          <a:blip xmlns:r="http://schemas.openxmlformats.org/officeDocument/2006/relationships" xmlns:a="http://schemas.openxmlformats.org/drawingml/2006/main" r:embed="R55476b14ce1943c2"/>
           <a:srcRect xmlns:a="http://schemas.openxmlformats.org/drawingml/2006/main" r="25000" b="15000"/>
           <a:stretch xmlns:a="http://schemas.openxmlformats.org/drawingml/2006/main">
             <a:fillRect/>
@@ -1746,7 +1746,7 @@
           <p:nvPr/>
         </p:nvPicPr>
         <p:blipFill>
-          <a:blip xmlns:r="http://schemas.openxmlformats.org/officeDocument/2006/relationships" xmlns:a="http://schemas.openxmlformats.org/drawingml/2006/main" r:embed="R4dd5d15e213b480c">
+          <a:blip xmlns:r="http://schemas.openxmlformats.org/officeDocument/2006/relationships" xmlns:a="http://schemas.openxmlformats.org/drawingml/2006/main" r:embed="R7a51c5f3cd244b4f">
             <a:lum bright="15000" contrast="20000"/>
           </a:blip>
           <a:srcRect xmlns:a="http://schemas.openxmlformats.org/drawingml/2006/main" l="10000" t="10000" r="10000" b="10000"/>
